--- a/docs/poster/variants/v35.pptx
+++ b/docs/poster/variants/v35.pptx
@@ -4287,6 +4287,90 @@
               </a:spcAft>
             </a:pPr>
             <a:r>
+              <a:rPr sz="6200" b="1">
+                <a:solidFill>
+                  <a:srgbClr val="1B7A55"/>
+                </a:solidFill>
+                <a:latin typeface="Arial Narrow"/>
+              </a:rPr>
+              <a:t>1,389</a:t>
+            </a:r>
+          </a:p>
+        </p:txBody>
+      </p:sp>
+      <p:sp>
+        <p:nvSpPr>
+          <p:cNvPr id="31" name="TextBox 30"/>
+          <p:cNvSpPr txBox="1"/>
+          <p:nvPr/>
+        </p:nvSpPr>
+        <p:spPr>
+          <a:xfrm>
+            <a:off x="731520" y="15669259"/>
+            <a:ext cx="20482560" cy="365760"/>
+          </a:xfrm>
+          <a:prstGeom prst="rect">
+            <a:avLst/>
+          </a:prstGeom>
+          <a:noFill/>
+        </p:spPr>
+        <p:txBody>
+          <a:bodyPr wrap="square" lIns="0" rIns="0" tIns="0" bIns="0">
+            <a:spAutoFit/>
+          </a:bodyPr>
+          <a:lstStyle/>
+          <a:p>
+            <a:pPr algn="l">
+              <a:lnSpc>
+                <a:spcPct val="122000"/>
+              </a:lnSpc>
+              <a:spcAft>
+                <a:spcPts val="600"/>
+              </a:spcAft>
+            </a:pPr>
+            <a:r>
+              <a:rPr sz="1500" b="0">
+                <a:solidFill>
+                  <a:srgbClr val="5C6B62"/>
+                </a:solidFill>
+                <a:latin typeface="Arial"/>
+              </a:rPr>
+              <a:t>joystick commands through the platform</a:t>
+            </a:r>
+          </a:p>
+        </p:txBody>
+      </p:sp>
+      <p:sp>
+        <p:nvSpPr>
+          <p:cNvPr id="32" name="TextBox 31"/>
+          <p:cNvSpPr txBox="1"/>
+          <p:nvPr/>
+        </p:nvSpPr>
+        <p:spPr>
+          <a:xfrm>
+            <a:off x="731520" y="16124173"/>
+            <a:ext cx="20482560" cy="365760"/>
+          </a:xfrm>
+          <a:prstGeom prst="rect">
+            <a:avLst/>
+          </a:prstGeom>
+          <a:noFill/>
+        </p:spPr>
+        <p:txBody>
+          <a:bodyPr wrap="square" lIns="0" rIns="0" tIns="0" bIns="0">
+            <a:spAutoFit/>
+          </a:bodyPr>
+          <a:lstStyle/>
+          <a:p>
+            <a:pPr algn="l">
+              <a:lnSpc>
+                <a:spcPct val="95000"/>
+              </a:lnSpc>
+              <a:spcAft>
+                <a:spcPts val="0"/>
+              </a:spcAft>
+            </a:pPr>
+            <a:r>
               <a:rPr sz="3200" b="1">
                 <a:solidFill>
                   <a:srgbClr val="1F3D2B"/>
@@ -4300,13 +4384,13 @@
       </p:sp>
       <p:sp>
         <p:nvSpPr>
-          <p:cNvPr id="31" name="Rectangle 30"/>
+          <p:cNvPr id="33" name="Rectangle 32"/>
           <p:cNvSpPr/>
           <p:nvPr/>
         </p:nvSpPr>
         <p:spPr>
           <a:xfrm>
-            <a:off x="731520" y="15394432"/>
+            <a:off x="731520" y="16652493"/>
             <a:ext cx="20482560" cy="27432"/>
           </a:xfrm>
           <a:prstGeom prst="rect">
@@ -4344,13 +4428,13 @@
       </p:sp>
       <p:sp>
         <p:nvSpPr>
-          <p:cNvPr id="32" name="TextBox 31"/>
+          <p:cNvPr id="34" name="TextBox 33"/>
           <p:cNvSpPr txBox="1"/>
           <p:nvPr/>
         </p:nvSpPr>
         <p:spPr>
           <a:xfrm>
-            <a:off x="731520" y="15723615"/>
+            <a:off x="731520" y="16981677"/>
             <a:ext cx="20482560" cy="365760"/>
           </a:xfrm>
           <a:prstGeom prst="rect">
@@ -4386,13 +4470,13 @@
       </p:sp>
       <p:sp>
         <p:nvSpPr>
-          <p:cNvPr id="33" name="TextBox 32"/>
+          <p:cNvPr id="35" name="TextBox 34"/>
           <p:cNvSpPr txBox="1"/>
           <p:nvPr/>
         </p:nvSpPr>
         <p:spPr>
           <a:xfrm>
-            <a:off x="731520" y="16801084"/>
+            <a:off x="731520" y="18059146"/>
             <a:ext cx="20482560" cy="365760"/>
           </a:xfrm>
           <a:prstGeom prst="rect">
@@ -4428,13 +4512,13 @@
       </p:sp>
       <p:sp>
         <p:nvSpPr>
-          <p:cNvPr id="34" name="Rectangle 33"/>
+          <p:cNvPr id="36" name="Rectangle 35"/>
           <p:cNvSpPr/>
           <p:nvPr/>
         </p:nvSpPr>
         <p:spPr>
           <a:xfrm>
-            <a:off x="731520" y="17329404"/>
+            <a:off x="731520" y="18587466"/>
             <a:ext cx="20482560" cy="27432"/>
           </a:xfrm>
           <a:prstGeom prst="rect">
@@ -4472,7 +4556,7 @@
       </p:sp>
       <p:pic>
         <p:nvPicPr>
-          <p:cNvPr id="35" name="Picture 34" descr="f_rounds.png"/>
+          <p:cNvPr id="37" name="Picture 36" descr="f_rounds.png"/>
           <p:cNvPicPr>
             <a:picLocks noChangeAspect="1"/>
           </p:cNvPicPr>
@@ -4486,7 +4570,7 @@
         </p:blipFill>
         <p:spPr>
           <a:xfrm>
-            <a:off x="731520" y="17658588"/>
+            <a:off x="731520" y="18916650"/>
             <a:ext cx="20482560" cy="4663440"/>
           </a:xfrm>
           <a:prstGeom prst="rect">
@@ -4496,13 +4580,13 @@
       </p:pic>
       <p:sp>
         <p:nvSpPr>
-          <p:cNvPr id="36" name="TextBox 35"/>
+          <p:cNvPr id="38" name="TextBox 37"/>
           <p:cNvSpPr txBox="1"/>
           <p:nvPr/>
         </p:nvSpPr>
         <p:spPr>
           <a:xfrm>
-            <a:off x="731520" y="22431756"/>
+            <a:off x="731520" y="23689818"/>
             <a:ext cx="20482560" cy="365760"/>
           </a:xfrm>
           <a:prstGeom prst="rect">
@@ -4538,13 +4622,13 @@
       </p:sp>
       <p:sp>
         <p:nvSpPr>
-          <p:cNvPr id="37" name="TextBox 36"/>
+          <p:cNvPr id="39" name="TextBox 38"/>
           <p:cNvSpPr txBox="1"/>
           <p:nvPr/>
         </p:nvSpPr>
         <p:spPr>
           <a:xfrm>
-            <a:off x="731520" y="23417022"/>
+            <a:off x="731520" y="24675084"/>
             <a:ext cx="20482560" cy="365760"/>
           </a:xfrm>
           <a:prstGeom prst="rect">
@@ -4580,7 +4664,7 @@
       </p:sp>
       <p:sp>
         <p:nvSpPr>
-          <p:cNvPr id="38" name="TextBox 37"/>
+          <p:cNvPr id="40" name="TextBox 39"/>
           <p:cNvSpPr txBox="1"/>
           <p:nvPr/>
         </p:nvSpPr>
@@ -4622,7 +4706,7 @@
       </p:sp>
       <p:sp>
         <p:nvSpPr>
-          <p:cNvPr id="39" name="Rectangle 38"/>
+          <p:cNvPr id="41" name="Rectangle 40"/>
           <p:cNvSpPr/>
           <p:nvPr/>
         </p:nvSpPr>
@@ -4666,7 +4750,7 @@
       </p:sp>
       <p:sp>
         <p:nvSpPr>
-          <p:cNvPr id="40" name="TextBox 39"/>
+          <p:cNvPr id="42" name="TextBox 41"/>
           <p:cNvSpPr txBox="1"/>
           <p:nvPr/>
         </p:nvSpPr>
@@ -4701,14 +4785,14 @@
                 </a:solidFill>
                 <a:latin typeface="Arial"/>
               </a:rPr>
-              <a:t>Robot 241 is a tracked rover that drives crop rows and streams camera, GPS and two IMUs. The laser cart carries the weeder: a galvanometer laser, a down camera over the work zone and a forward camera. A Unitree humanoid has a project and has uploaded nothing yet. Between them the two ground vehicles have recorded 2,686 frames in 26 drives.</a:t>
-            </a:r>
-          </a:p>
-        </p:txBody>
-      </p:sp>
-      <p:sp>
-        <p:nvSpPr>
-          <p:cNvPr id="41" name="TextBox 40"/>
+              <a:t>Robot 241 is a tracked rover that drives crop rows and streams camera, GPS and two IMUs. The laser cart carries the weeder: a galvanometer laser, a down camera over the work zone and a forward camera. Ten projects sit on the platform and two of them have a robot reporting into them. Between those two vehicles, 2,686 frames in 26 drives.</a:t>
+            </a:r>
+          </a:p>
+        </p:txBody>
+      </p:sp>
+      <p:sp>
+        <p:nvSpPr>
+          <p:cNvPr id="43" name="TextBox 42"/>
           <p:cNvSpPr txBox="1"/>
           <p:nvPr/>
         </p:nvSpPr>
@@ -4737,6 +4821,90 @@
               </a:spcAft>
             </a:pPr>
             <a:r>
+              <a:rPr sz="6200" b="1">
+                <a:solidFill>
+                  <a:srgbClr val="1B7A55"/>
+                </a:solidFill>
+                <a:latin typeface="Arial Narrow"/>
+              </a:rPr>
+              <a:t>14</a:t>
+            </a:r>
+          </a:p>
+        </p:txBody>
+      </p:sp>
+      <p:sp>
+        <p:nvSpPr>
+          <p:cNvPr id="44" name="TextBox 43"/>
+          <p:cNvSpPr txBox="1"/>
+          <p:nvPr/>
+        </p:nvSpPr>
+        <p:spPr>
+          <a:xfrm>
+            <a:off x="21579840" y="15963645"/>
+            <a:ext cx="10607040" cy="365760"/>
+          </a:xfrm>
+          <a:prstGeom prst="rect">
+            <a:avLst/>
+          </a:prstGeom>
+          <a:noFill/>
+        </p:spPr>
+        <p:txBody>
+          <a:bodyPr wrap="square" lIns="0" rIns="0" tIns="0" bIns="0">
+            <a:spAutoFit/>
+          </a:bodyPr>
+          <a:lstStyle/>
+          <a:p>
+            <a:pPr algn="l">
+              <a:lnSpc>
+                <a:spcPct val="122000"/>
+              </a:lnSpc>
+              <a:spcAft>
+                <a:spcPts val="600"/>
+              </a:spcAft>
+            </a:pPr>
+            <a:r>
+              <a:rPr sz="1500" b="0">
+                <a:solidFill>
+                  <a:srgbClr val="5C6B62"/>
+                </a:solidFill>
+                <a:latin typeface="Arial"/>
+              </a:rPr>
+              <a:t>analysis tools the planner can choose from</a:t>
+            </a:r>
+          </a:p>
+        </p:txBody>
+      </p:sp>
+      <p:sp>
+        <p:nvSpPr>
+          <p:cNvPr id="45" name="TextBox 44"/>
+          <p:cNvSpPr txBox="1"/>
+          <p:nvPr/>
+        </p:nvSpPr>
+        <p:spPr>
+          <a:xfrm>
+            <a:off x="21579840" y="16418559"/>
+            <a:ext cx="10607040" cy="365760"/>
+          </a:xfrm>
+          <a:prstGeom prst="rect">
+            <a:avLst/>
+          </a:prstGeom>
+          <a:noFill/>
+        </p:spPr>
+        <p:txBody>
+          <a:bodyPr wrap="square" lIns="0" rIns="0" tIns="0" bIns="0">
+            <a:spAutoFit/>
+          </a:bodyPr>
+          <a:lstStyle/>
+          <a:p>
+            <a:pPr algn="l">
+              <a:lnSpc>
+                <a:spcPct val="95000"/>
+              </a:lnSpc>
+              <a:spcAft>
+                <a:spcPts val="0"/>
+              </a:spcAft>
+            </a:pPr>
+            <a:r>
               <a:rPr sz="3200" b="1">
                 <a:solidFill>
                   <a:srgbClr val="1F3D2B"/>
@@ -4750,13 +4918,13 @@
       </p:sp>
       <p:sp>
         <p:nvSpPr>
-          <p:cNvPr id="42" name="Rectangle 41"/>
+          <p:cNvPr id="46" name="Rectangle 45"/>
           <p:cNvSpPr/>
           <p:nvPr/>
         </p:nvSpPr>
         <p:spPr>
           <a:xfrm>
-            <a:off x="21579840" y="15688817"/>
+            <a:off x="21579840" y="16946880"/>
             <a:ext cx="10607040" cy="27432"/>
           </a:xfrm>
           <a:prstGeom prst="rect">
@@ -4794,13 +4962,13 @@
       </p:sp>
       <p:sp>
         <p:nvSpPr>
-          <p:cNvPr id="43" name="TextBox 42"/>
+          <p:cNvPr id="47" name="TextBox 46"/>
           <p:cNvSpPr txBox="1"/>
           <p:nvPr/>
         </p:nvSpPr>
         <p:spPr>
           <a:xfrm>
-            <a:off x="21579840" y="16018001"/>
+            <a:off x="21579840" y="17276063"/>
             <a:ext cx="10607040" cy="365760"/>
           </a:xfrm>
           <a:prstGeom prst="rect">
@@ -4836,13 +5004,13 @@
       </p:sp>
       <p:sp>
         <p:nvSpPr>
-          <p:cNvPr id="44" name="TextBox 43"/>
+          <p:cNvPr id="48" name="TextBox 47"/>
           <p:cNvSpPr txBox="1"/>
           <p:nvPr/>
         </p:nvSpPr>
         <p:spPr>
           <a:xfrm>
-            <a:off x="21579840" y="17684242"/>
+            <a:off x="21579840" y="18942304"/>
             <a:ext cx="10607040" cy="365760"/>
           </a:xfrm>
           <a:prstGeom prst="rect">
@@ -4878,13 +5046,13 @@
       </p:sp>
       <p:sp>
         <p:nvSpPr>
-          <p:cNvPr id="45" name="Rectangle 44"/>
+          <p:cNvPr id="49" name="Rectangle 48"/>
           <p:cNvSpPr/>
           <p:nvPr/>
         </p:nvSpPr>
         <p:spPr>
           <a:xfrm>
-            <a:off x="21579840" y="18212562"/>
+            <a:off x="21579840" y="19470624"/>
             <a:ext cx="10607040" cy="27432"/>
           </a:xfrm>
           <a:prstGeom prst="rect">
@@ -4922,13 +5090,13 @@
       </p:sp>
       <p:sp>
         <p:nvSpPr>
-          <p:cNvPr id="46" name="TextBox 45"/>
+          <p:cNvPr id="50" name="TextBox 49"/>
           <p:cNvSpPr txBox="1"/>
           <p:nvPr/>
         </p:nvSpPr>
         <p:spPr>
           <a:xfrm>
-            <a:off x="21579840" y="18541746"/>
+            <a:off x="21579840" y="19799808"/>
             <a:ext cx="10607040" cy="365760"/>
           </a:xfrm>
           <a:prstGeom prst="rect">
@@ -4964,13 +5132,13 @@
       </p:sp>
       <p:sp>
         <p:nvSpPr>
-          <p:cNvPr id="47" name="TextBox 46"/>
+          <p:cNvPr id="51" name="TextBox 50"/>
           <p:cNvSpPr txBox="1"/>
           <p:nvPr/>
         </p:nvSpPr>
         <p:spPr>
           <a:xfrm>
-            <a:off x="21579840" y="19913600"/>
+            <a:off x="21579840" y="21171662"/>
             <a:ext cx="10607040" cy="365760"/>
           </a:xfrm>
           <a:prstGeom prst="rect">
@@ -4993,6 +5161,90 @@
               </a:spcAft>
             </a:pPr>
             <a:r>
+              <a:rPr sz="6200" b="1">
+                <a:solidFill>
+                  <a:srgbClr val="1B7A55"/>
+                </a:solidFill>
+                <a:latin typeface="Arial Narrow"/>
+              </a:rPr>
+              <a:t>92</a:t>
+            </a:r>
+          </a:p>
+        </p:txBody>
+      </p:sp>
+      <p:sp>
+        <p:nvSpPr>
+          <p:cNvPr id="52" name="TextBox 51"/>
+          <p:cNvSpPr txBox="1"/>
+          <p:nvPr/>
+        </p:nvSpPr>
+        <p:spPr>
+          <a:xfrm>
+            <a:off x="21579840" y="21974810"/>
+            <a:ext cx="10607040" cy="365760"/>
+          </a:xfrm>
+          <a:prstGeom prst="rect">
+            <a:avLst/>
+          </a:prstGeom>
+          <a:noFill/>
+        </p:spPr>
+        <p:txBody>
+          <a:bodyPr wrap="square" lIns="0" rIns="0" tIns="0" bIns="0">
+            <a:spAutoFit/>
+          </a:bodyPr>
+          <a:lstStyle/>
+          <a:p>
+            <a:pPr algn="l">
+              <a:lnSpc>
+                <a:spcPct val="122000"/>
+              </a:lnSpc>
+              <a:spcAft>
+                <a:spcPts val="600"/>
+              </a:spcAft>
+            </a:pPr>
+            <a:r>
+              <a:rPr sz="1500" b="0">
+                <a:solidFill>
+                  <a:srgbClr val="5C6B62"/>
+                </a:solidFill>
+                <a:latin typeface="Arial"/>
+              </a:rPr>
+              <a:t>questions asked of a dataset so far</a:t>
+            </a:r>
+          </a:p>
+        </p:txBody>
+      </p:sp>
+      <p:sp>
+        <p:nvSpPr>
+          <p:cNvPr id="53" name="TextBox 52"/>
+          <p:cNvSpPr txBox="1"/>
+          <p:nvPr/>
+        </p:nvSpPr>
+        <p:spPr>
+          <a:xfrm>
+            <a:off x="21579840" y="22429724"/>
+            <a:ext cx="10607040" cy="365760"/>
+          </a:xfrm>
+          <a:prstGeom prst="rect">
+            <a:avLst/>
+          </a:prstGeom>
+          <a:noFill/>
+        </p:spPr>
+        <p:txBody>
+          <a:bodyPr wrap="square" lIns="0" rIns="0" tIns="0" bIns="0">
+            <a:spAutoFit/>
+          </a:bodyPr>
+          <a:lstStyle/>
+          <a:p>
+            <a:pPr algn="l">
+              <a:lnSpc>
+                <a:spcPct val="95000"/>
+              </a:lnSpc>
+              <a:spcAft>
+                <a:spcPts val="0"/>
+              </a:spcAft>
+            </a:pPr>
+            <a:r>
               <a:rPr sz="3200" b="1">
                 <a:solidFill>
                   <a:srgbClr val="1F3D2B"/>
@@ -5006,13 +5258,13 @@
       </p:sp>
       <p:sp>
         <p:nvSpPr>
-          <p:cNvPr id="48" name="Rectangle 47"/>
+          <p:cNvPr id="54" name="Rectangle 53"/>
           <p:cNvSpPr/>
           <p:nvPr/>
         </p:nvSpPr>
         <p:spPr>
           <a:xfrm>
-            <a:off x="21579840" y="20441920"/>
+            <a:off x="21579840" y="22958044"/>
             <a:ext cx="10607040" cy="27432"/>
           </a:xfrm>
           <a:prstGeom prst="rect">
@@ -5050,13 +5302,13 @@
       </p:sp>
       <p:sp>
         <p:nvSpPr>
-          <p:cNvPr id="49" name="TextBox 48"/>
+          <p:cNvPr id="55" name="TextBox 54"/>
           <p:cNvSpPr txBox="1"/>
           <p:nvPr/>
         </p:nvSpPr>
         <p:spPr>
           <a:xfrm>
-            <a:off x="21579840" y="20771104"/>
+            <a:off x="21579840" y="23287228"/>
             <a:ext cx="10607040" cy="365760"/>
           </a:xfrm>
           <a:prstGeom prst="rect">
@@ -5092,13 +5344,13 @@
       </p:sp>
       <p:sp>
         <p:nvSpPr>
-          <p:cNvPr id="50" name="TextBox 49"/>
+          <p:cNvPr id="56" name="TextBox 55"/>
           <p:cNvSpPr txBox="1"/>
           <p:nvPr/>
         </p:nvSpPr>
         <p:spPr>
           <a:xfrm>
-            <a:off x="21579840" y="22437344"/>
+            <a:off x="21579840" y="24953468"/>
             <a:ext cx="10607040" cy="365760"/>
           </a:xfrm>
           <a:prstGeom prst="rect">
@@ -5134,13 +5386,13 @@
       </p:sp>
       <p:sp>
         <p:nvSpPr>
-          <p:cNvPr id="51" name="Rectangle 50"/>
+          <p:cNvPr id="57" name="Rectangle 56"/>
           <p:cNvSpPr/>
           <p:nvPr/>
         </p:nvSpPr>
         <p:spPr>
           <a:xfrm>
-            <a:off x="21579840" y="22965664"/>
+            <a:off x="21579840" y="25481788"/>
             <a:ext cx="10607040" cy="27432"/>
           </a:xfrm>
           <a:prstGeom prst="rect">
@@ -5178,13 +5430,13 @@
       </p:sp>
       <p:sp>
         <p:nvSpPr>
-          <p:cNvPr id="52" name="TextBox 51"/>
+          <p:cNvPr id="58" name="TextBox 57"/>
           <p:cNvSpPr txBox="1"/>
           <p:nvPr/>
         </p:nvSpPr>
         <p:spPr>
           <a:xfrm>
-            <a:off x="21579840" y="23294848"/>
+            <a:off x="21579840" y="25810972"/>
             <a:ext cx="10607040" cy="365760"/>
           </a:xfrm>
           <a:prstGeom prst="rect">
@@ -5220,7 +5472,7 @@
       </p:sp>
       <p:sp>
         <p:nvSpPr>
-          <p:cNvPr id="53" name="TextBox 52"/>
+          <p:cNvPr id="59" name="TextBox 58"/>
           <p:cNvSpPr txBox="1"/>
           <p:nvPr/>
         </p:nvSpPr>
@@ -5262,7 +5514,7 @@
       </p:sp>
       <p:sp>
         <p:nvSpPr>
-          <p:cNvPr id="54" name="Rectangle 53"/>
+          <p:cNvPr id="60" name="Rectangle 59"/>
           <p:cNvSpPr/>
           <p:nvPr/>
         </p:nvSpPr>
@@ -5306,7 +5558,7 @@
       </p:sp>
       <p:sp>
         <p:nvSpPr>
-          <p:cNvPr id="55" name="TextBox 54"/>
+          <p:cNvPr id="61" name="TextBox 60"/>
           <p:cNvSpPr txBox="1"/>
           <p:nvPr/>
         </p:nvSpPr>
@@ -5348,7 +5600,7 @@
       </p:sp>
       <p:sp>
         <p:nvSpPr>
-          <p:cNvPr id="56" name="TextBox 55"/>
+          <p:cNvPr id="62" name="TextBox 61"/>
           <p:cNvSpPr txBox="1"/>
           <p:nvPr/>
         </p:nvSpPr>
@@ -5390,7 +5642,7 @@
       </p:sp>
       <p:sp>
         <p:nvSpPr>
-          <p:cNvPr id="57" name="Rectangle 56"/>
+          <p:cNvPr id="63" name="Rectangle 62"/>
           <p:cNvSpPr/>
           <p:nvPr/>
         </p:nvSpPr>
@@ -5434,7 +5686,7 @@
       </p:sp>
       <p:pic>
         <p:nvPicPr>
-          <p:cNvPr id="58" name="Picture 57" descr="l_robots.png"/>
+          <p:cNvPr id="64" name="Picture 63" descr="l_robots.png"/>
           <p:cNvPicPr>
             <a:picLocks noChangeAspect="1"/>
           </p:cNvPicPr>
@@ -5458,7 +5710,7 @@
       </p:pic>
       <p:sp>
         <p:nvSpPr>
-          <p:cNvPr id="59" name="TextBox 58"/>
+          <p:cNvPr id="65" name="TextBox 64"/>
           <p:cNvSpPr txBox="1"/>
           <p:nvPr/>
         </p:nvSpPr>
@@ -5500,7 +5752,7 @@
       </p:sp>
       <p:sp>
         <p:nvSpPr>
-          <p:cNvPr id="60" name="TextBox 59"/>
+          <p:cNvPr id="66" name="TextBox 65"/>
           <p:cNvSpPr txBox="1"/>
           <p:nvPr/>
         </p:nvSpPr>
@@ -5542,7 +5794,7 @@
       </p:sp>
       <p:sp>
         <p:nvSpPr>
-          <p:cNvPr id="61" name="TextBox 60"/>
+          <p:cNvPr id="67" name="TextBox 66"/>
           <p:cNvSpPr txBox="1"/>
           <p:nvPr/>
         </p:nvSpPr>
@@ -5584,7 +5836,7 @@
       </p:sp>
       <p:sp>
         <p:nvSpPr>
-          <p:cNvPr id="62" name="Rectangle 61"/>
+          <p:cNvPr id="68" name="Rectangle 67"/>
           <p:cNvSpPr/>
           <p:nvPr/>
         </p:nvSpPr>
@@ -5628,7 +5880,7 @@
       </p:sp>
       <p:sp>
         <p:nvSpPr>
-          <p:cNvPr id="63" name="TextBox 62"/>
+          <p:cNvPr id="69" name="TextBox 68"/>
           <p:cNvSpPr txBox="1"/>
           <p:nvPr/>
         </p:nvSpPr>
@@ -5670,7 +5922,7 @@
       </p:sp>
       <p:sp>
         <p:nvSpPr>
-          <p:cNvPr id="64" name="TextBox 63"/>
+          <p:cNvPr id="70" name="TextBox 69"/>
           <p:cNvSpPr txBox="1"/>
           <p:nvPr/>
         </p:nvSpPr>
@@ -5712,7 +5964,7 @@
       </p:sp>
       <p:sp>
         <p:nvSpPr>
-          <p:cNvPr id="65" name="Rectangle 64"/>
+          <p:cNvPr id="71" name="Rectangle 70"/>
           <p:cNvSpPr/>
           <p:nvPr/>
         </p:nvSpPr>
@@ -5756,7 +6008,7 @@
       </p:sp>
       <p:sp>
         <p:nvSpPr>
-          <p:cNvPr id="66" name="TextBox 65"/>
+          <p:cNvPr id="72" name="TextBox 71"/>
           <p:cNvSpPr txBox="1"/>
           <p:nvPr/>
         </p:nvSpPr>
@@ -5798,7 +6050,7 @@
       </p:sp>
       <p:sp>
         <p:nvSpPr>
-          <p:cNvPr id="67" name="TextBox 66"/>
+          <p:cNvPr id="73" name="TextBox 72"/>
           <p:cNvSpPr txBox="1"/>
           <p:nvPr/>
         </p:nvSpPr>
@@ -5840,7 +6092,7 @@
       </p:sp>
       <p:sp>
         <p:nvSpPr>
-          <p:cNvPr id="68" name="Rectangle 67"/>
+          <p:cNvPr id="74" name="Rectangle 73"/>
           <p:cNvSpPr/>
           <p:nvPr/>
         </p:nvSpPr>
@@ -5884,7 +6136,7 @@
       </p:sp>
       <p:sp>
         <p:nvSpPr>
-          <p:cNvPr id="69" name="TextBox 68"/>
+          <p:cNvPr id="75" name="TextBox 74"/>
           <p:cNvSpPr txBox="1"/>
           <p:nvPr/>
         </p:nvSpPr>
@@ -5926,7 +6178,7 @@
       </p:sp>
       <p:sp>
         <p:nvSpPr>
-          <p:cNvPr id="70" name="Rectangle 69"/>
+          <p:cNvPr id="76" name="Rectangle 75"/>
           <p:cNvSpPr/>
           <p:nvPr/>
         </p:nvSpPr>
@@ -5970,7 +6222,7 @@
       </p:sp>
       <p:sp>
         <p:nvSpPr>
-          <p:cNvPr id="71" name="TextBox 70"/>
+          <p:cNvPr id="77" name="TextBox 76"/>
           <p:cNvSpPr txBox="1"/>
           <p:nvPr/>
         </p:nvSpPr>
@@ -6012,7 +6264,7 @@
       </p:sp>
       <p:sp>
         <p:nvSpPr>
-          <p:cNvPr id="72" name="TextBox 71"/>
+          <p:cNvPr id="78" name="TextBox 77"/>
           <p:cNvSpPr txBox="1"/>
           <p:nvPr/>
         </p:nvSpPr>
@@ -6054,7 +6306,7 @@
       </p:sp>
       <p:sp>
         <p:nvSpPr>
-          <p:cNvPr id="73" name="TextBox 72"/>
+          <p:cNvPr id="79" name="TextBox 78"/>
           <p:cNvSpPr txBox="1"/>
           <p:nvPr/>
         </p:nvSpPr>
